--- a/docs/content/t_tests_2/t_tests_2_activity.pptx
+++ b/docs/content/t_tests_2/t_tests_2_activity.pptx
@@ -3292,7 +3292,7 @@
             </a:pPr>
             <a:r>
               <a:rPr/>
-              <a:t>Worksheet 10 - T-Tests II: Running &amp; Reporting the Test</a:t>
+              <a:t>Worksheet — T-Tests II: Running, Reporting &amp; Extension</a:t>
             </a:r>
           </a:p>
         </p:txBody>
@@ -3560,7 +3560,7 @@
             </a:pPr>
             <a:r>
               <a:rPr/>
-              <a:t>Part 7 · Going further</a:t>
+              <a:t>Extension — out of class (~30–40 min)</a:t>
             </a:r>
           </a:p>
         </p:txBody>
@@ -3580,12 +3580,80 @@
           <a:bodyPr/>
           <a:lstStyle/>
           <a:p>
+            <a:pPr lvl="0" indent="0" marL="0">
+              <a:buNone/>
+            </a:pPr>
+            <a:r>
+              <a:rPr i="1"/>
+              <a:t>Turn this in with your worksheet. In class we ran a </a:t>
+            </a:r>
+            <a:r>
+              <a:rPr b="1" i="1"/>
+              <a:t>two-tailed</a:t>
+            </a:r>
+            <a:r>
+              <a:rPr i="1"/>
+              <a:t> test on leaf weight. The extension changes two things: a </a:t>
+            </a:r>
+            <a:r>
+              <a:rPr b="1" i="1"/>
+              <a:t>new variable you choose</a:t>
+            </a:r>
+            <a:r>
+              <a:rPr i="1"/>
+              <a:t> and a </a:t>
+            </a:r>
+            <a:r>
+              <a:rPr b="1" i="1"/>
+              <a:t>one-tailed (directional) hypothesis</a:t>
+            </a:r>
+            <a:r>
+              <a:rPr i="1"/>
+              <a:t> — which behaves differently and is easy to misuse.</a:t>
+            </a:r>
+          </a:p>
+          <a:p>
             <a:pPr lvl="0" indent="0" marL="1270000">
               <a:buNone/>
             </a:pPr>
             <a:r>
+              <a:rPr sz="2000" b="1"/>
+              <a:t>Important</a:t>
+            </a:r>
+          </a:p>
+          <a:p>
+            <a:pPr lvl="0" indent="0" marL="1270000">
+              <a:buNone/>
+            </a:pPr>
+            <a:r>
               <a:rPr sz="2000"/>
-              <a:t>This section is optional — work through it if you finish early or want to push deeper.</a:t>
+              <a:t>The prediction and explanation in </a:t>
+            </a:r>
+            <a:r>
+              <a:rPr sz="2000" b="1"/>
+              <a:t>E2 and E3 must be handwritten</a:t>
+            </a:r>
+            <a:r>
+              <a:rPr sz="2000"/>
+              <a:t> on paper, photographed, and embedded in your submission (</a:t>
+            </a:r>
+            <a:r>
+              <a:rPr sz="2000">
+                <a:latin typeface="Courier"/>
+              </a:rPr>
+              <a:t>![caption](my_photo.jpg)</a:t>
+            </a:r>
+            <a:r>
+              <a:rPr sz="2000"/>
+              <a:t>). Typed answers to E2/E3 get </a:t>
+            </a:r>
+            <a:r>
+              <a:rPr sz="2000" b="1"/>
+              <a:t>at most half credit, even if correct</a:t>
+            </a:r>
+            <a:r>
+              <a:rPr sz="2000"/>
+              <a:t>.</a:t>
             </a:r>
           </a:p>
           <a:p>
@@ -3597,36 +3665,315 @@
             </a:pPr>
             <a:r>
               <a:rPr b="1"/>
-              <a:t>Test a second variable: </a:t>
-            </a:r>
-            <a:r>
-              <a:rPr b="1">
+              <a:t>E1 · A directional test on a new variable (3 pts)</a:t>
+            </a:r>
+          </a:p>
+          <a:p>
+            <a:pPr lvl="0" indent="0" marL="0">
+              <a:buNone/>
+            </a:pPr>
+            <a:r>
+              <a:rPr/>
+              <a:t>Pick </a:t>
+            </a:r>
+            <a:r>
+              <a:rPr b="1"/>
+              <a:t>one</a:t>
+            </a:r>
+            <a:r>
+              <a:rPr/>
+              <a:t> variable you did </a:t>
+            </a:r>
+            <a:r>
+              <a:rPr b="1"/>
+              <a:t>not</a:t>
+            </a:r>
+            <a:r>
+              <a:rPr/>
+              <a:t> test in class: </a:t>
+            </a:r>
+            <a:r>
+              <a:rPr>
                 <a:latin typeface="Courier"/>
               </a:rPr>
               <a:t>height_cm</a:t>
             </a:r>
-          </a:p>
-          <a:p>
-            <a:pPr lvl="0" indent="0" marL="0">
+            <a:r>
+              <a:rPr/>
+              <a:t> or </a:t>
+            </a:r>
+            <a:r>
+              <a:rPr>
+                <a:latin typeface="Courier"/>
+              </a:rPr>
+              <a:t>width_cm</a:t>
+            </a:r>
+            <a:r>
+              <a:rPr/>
+              <a:t>. Write down which you picked and, </a:t>
+            </a:r>
+            <a:r>
+              <a:rPr i="1"/>
+              <a:t>before running anything</a:t>
+            </a:r>
+            <a:r>
+              <a:rPr/>
+              <a:t>, a </a:t>
+            </a:r>
+            <a:r>
+              <a:rPr b="1"/>
+              <a:t>directional</a:t>
+            </a:r>
+            <a:r>
+              <a:rPr/>
+              <a:t> hypothesis — e.g. “shady leaves are </a:t>
+            </a:r>
+            <a:r>
+              <a:rPr b="1"/>
+              <a:t>larger</a:t>
+            </a:r>
+            <a:r>
+              <a:rPr/>
+              <a:t>”, i.e. Hₐ: μ_shady &gt; μ_sunny.</a:t>
+            </a:r>
+          </a:p>
+          <a:p>
+            <a:pPr lvl="0" indent="0">
               <a:buNone/>
             </a:pPr>
             <a:r>
-              <a:rPr b="1"/>
-              <a:t>▶ Try this:</a:t>
-            </a:r>
-          </a:p>
-          <a:p>
-            <a:pPr lvl="0" indent="0">
-              <a:buNone/>
-            </a:pPr>
-            <a:r>
               <a:rPr>
                 <a:solidFill>
                   <a:srgbClr val="5E5E5E"/>
                 </a:solidFill>
                 <a:latin typeface="Courier"/>
               </a:rPr>
-              <a:t># Run the same t-test pipeline for height_cm ---------</a:t>
+              <a:t># Replace ___ with "height_cm" or "width_cm".</a:t>
+            </a:r>
+            <a:br/>
+            <a:r>
+              <a:rPr>
+                <a:solidFill>
+                  <a:srgbClr val="5E5E5E"/>
+                </a:solidFill>
+                <a:latin typeface="Courier"/>
+              </a:rPr>
+              <a:t># alternative is "greater"/"less" for the FIRST group alphabetically</a:t>
+            </a:r>
+            <a:br/>
+            <a:r>
+              <a:rPr>
+                <a:solidFill>
+                  <a:srgbClr val="5E5E5E"/>
+                </a:solidFill>
+                <a:latin typeface="Courier"/>
+              </a:rPr>
+              <a:t># ("shady" comes before "sunny"), so "shady larger" = "greater".</a:t>
+            </a:r>
+            <a:br/>
+            <a:r>
+              <a:rPr>
+                <a:solidFill>
+                  <a:srgbClr val="003B4F"/>
+                </a:solidFill>
+                <a:latin typeface="Courier"/>
+              </a:rPr>
+              <a:t>one_tail_model &lt;- </a:t>
+            </a:r>
+            <a:r>
+              <a:rPr>
+                <a:solidFill>
+                  <a:srgbClr val="4758AB"/>
+                </a:solidFill>
+                <a:latin typeface="Courier"/>
+              </a:rPr>
+              <a:t>t.test</a:t>
+            </a:r>
+            <a:r>
+              <a:rPr>
+                <a:solidFill>
+                  <a:srgbClr val="003B4F"/>
+                </a:solidFill>
+                <a:latin typeface="Courier"/>
+              </a:rPr>
+              <a:t>(</a:t>
+            </a:r>
+            <a:br/>
+            <a:r>
+              <a:rPr>
+                <a:solidFill>
+                  <a:srgbClr val="003B4F"/>
+                </a:solidFill>
+                <a:latin typeface="Courier"/>
+              </a:rPr>
+              <a:t>  ___ </a:t>
+            </a:r>
+            <a:r>
+              <a:rPr>
+                <a:solidFill>
+                  <a:srgbClr val="5E5E5E"/>
+                </a:solidFill>
+                <a:latin typeface="Courier"/>
+              </a:rPr>
+              <a:t>~</a:t>
+            </a:r>
+            <a:r>
+              <a:rPr>
+                <a:solidFill>
+                  <a:srgbClr val="003B4F"/>
+                </a:solidFill>
+                <a:latin typeface="Courier"/>
+              </a:rPr>
+              <a:t> side,</a:t>
+            </a:r>
+            <a:br/>
+            <a:r>
+              <a:rPr>
+                <a:solidFill>
+                  <a:srgbClr val="003B4F"/>
+                </a:solidFill>
+                <a:latin typeface="Courier"/>
+              </a:rPr>
+              <a:t>  </a:t>
+            </a:r>
+            <a:r>
+              <a:rPr>
+                <a:solidFill>
+                  <a:srgbClr val="657422"/>
+                </a:solidFill>
+                <a:latin typeface="Courier"/>
+              </a:rPr>
+              <a:t>data        =</a:t>
+            </a:r>
+            <a:r>
+              <a:rPr>
+                <a:solidFill>
+                  <a:srgbClr val="003B4F"/>
+                </a:solidFill>
+                <a:latin typeface="Courier"/>
+              </a:rPr>
+              <a:t> tree_df,</a:t>
+            </a:r>
+            <a:br/>
+            <a:r>
+              <a:rPr>
+                <a:solidFill>
+                  <a:srgbClr val="003B4F"/>
+                </a:solidFill>
+                <a:latin typeface="Courier"/>
+              </a:rPr>
+              <a:t>  </a:t>
+            </a:r>
+            <a:r>
+              <a:rPr>
+                <a:solidFill>
+                  <a:srgbClr val="657422"/>
+                </a:solidFill>
+                <a:latin typeface="Courier"/>
+              </a:rPr>
+              <a:t>var.equal   =</a:t>
+            </a:r>
+            <a:r>
+              <a:rPr>
+                <a:solidFill>
+                  <a:srgbClr val="003B4F"/>
+                </a:solidFill>
+                <a:latin typeface="Courier"/>
+              </a:rPr>
+              <a:t> </a:t>
+            </a:r>
+            <a:r>
+              <a:rPr>
+                <a:solidFill>
+                  <a:srgbClr val="8F5902"/>
+                </a:solidFill>
+                <a:latin typeface="Courier"/>
+              </a:rPr>
+              <a:t>FALSE</a:t>
+            </a:r>
+            <a:r>
+              <a:rPr>
+                <a:solidFill>
+                  <a:srgbClr val="003B4F"/>
+                </a:solidFill>
+                <a:latin typeface="Courier"/>
+              </a:rPr>
+              <a:t>,</a:t>
+            </a:r>
+            <a:br/>
+            <a:r>
+              <a:rPr>
+                <a:solidFill>
+                  <a:srgbClr val="003B4F"/>
+                </a:solidFill>
+                <a:latin typeface="Courier"/>
+              </a:rPr>
+              <a:t>  </a:t>
+            </a:r>
+            <a:r>
+              <a:rPr>
+                <a:solidFill>
+                  <a:srgbClr val="657422"/>
+                </a:solidFill>
+                <a:latin typeface="Courier"/>
+              </a:rPr>
+              <a:t>alternative =</a:t>
+            </a:r>
+            <a:r>
+              <a:rPr>
+                <a:solidFill>
+                  <a:srgbClr val="003B4F"/>
+                </a:solidFill>
+                <a:latin typeface="Courier"/>
+              </a:rPr>
+              <a:t> </a:t>
+            </a:r>
+            <a:r>
+              <a:rPr>
+                <a:solidFill>
+                  <a:srgbClr val="20794D"/>
+                </a:solidFill>
+                <a:latin typeface="Courier"/>
+              </a:rPr>
+              <a:t>"greater"</a:t>
+            </a:r>
+            <a:r>
+              <a:rPr>
+                <a:solidFill>
+                  <a:srgbClr val="003B4F"/>
+                </a:solidFill>
+                <a:latin typeface="Courier"/>
+              </a:rPr>
+              <a:t>      </a:t>
+            </a:r>
+            <a:r>
+              <a:rPr>
+                <a:solidFill>
+                  <a:srgbClr val="5E5E5E"/>
+                </a:solidFill>
+                <a:latin typeface="Courier"/>
+              </a:rPr>
+              <a:t># &lt;- directional; change if your Ha points the other way</a:t>
+            </a:r>
+            <a:br/>
+            <a:r>
+              <a:rPr>
+                <a:solidFill>
+                  <a:srgbClr val="003B4F"/>
+                </a:solidFill>
+                <a:latin typeface="Courier"/>
+              </a:rPr>
+              <a:t>)</a:t>
+            </a:r>
+            <a:br/>
+            <a:r>
+              <a:rPr>
+                <a:solidFill>
+                  <a:srgbClr val="003B4F"/>
+                </a:solidFill>
+                <a:latin typeface="Courier"/>
+              </a:rPr>
+              <a:t>one_tail_model</a:t>
             </a:r>
             <a:br/>
             <a:br/>
@@ -3637,17 +3984,26 @@
                 </a:solidFill>
                 <a:latin typeface="Courier"/>
               </a:rPr>
-              <a:t># 1. Stats recap</a:t>
+              <a:t># For comparison, the two-tailed version of the SAME test</a:t>
             </a:r>
             <a:br/>
             <a:r>
               <a:rPr>
                 <a:solidFill>
-                  <a:srgbClr val="003B4F"/>
-                </a:solidFill>
-                <a:latin typeface="Courier"/>
-              </a:rPr>
-              <a:t>tree_df </a:t>
+                  <a:srgbClr val="4758AB"/>
+                </a:solidFill>
+                <a:latin typeface="Courier"/>
+              </a:rPr>
+              <a:t>t.test</a:t>
+            </a:r>
+            <a:r>
+              <a:rPr>
+                <a:solidFill>
+                  <a:srgbClr val="003B4F"/>
+                </a:solidFill>
+                <a:latin typeface="Courier"/>
+              </a:rPr>
+              <a:t>(___ </a:t>
             </a:r>
             <a:r>
               <a:rPr>
@@ -3656,35 +4012,70 @@
                 </a:solidFill>
                 <a:latin typeface="Courier"/>
               </a:rPr>
-              <a:t>%&gt;%</a:t>
-            </a:r>
-            <a:br/>
-            <a:r>
-              <a:rPr>
-                <a:solidFill>
-                  <a:srgbClr val="003B4F"/>
-                </a:solidFill>
-                <a:latin typeface="Courier"/>
-              </a:rPr>
-              <a:t>  </a:t>
-            </a:r>
-            <a:r>
-              <a:rPr>
-                <a:solidFill>
-                  <a:srgbClr val="4758AB"/>
-                </a:solidFill>
-                <a:latin typeface="Courier"/>
-              </a:rPr>
-              <a:t>group_by</a:t>
-            </a:r>
-            <a:r>
-              <a:rPr>
-                <a:solidFill>
-                  <a:srgbClr val="003B4F"/>
-                </a:solidFill>
-                <a:latin typeface="Courier"/>
-              </a:rPr>
-              <a:t>(side) </a:t>
+              <a:t>~</a:t>
+            </a:r>
+            <a:r>
+              <a:rPr>
+                <a:solidFill>
+                  <a:srgbClr val="003B4F"/>
+                </a:solidFill>
+                <a:latin typeface="Courier"/>
+              </a:rPr>
+              <a:t> side, </a:t>
+            </a:r>
+            <a:r>
+              <a:rPr>
+                <a:solidFill>
+                  <a:srgbClr val="657422"/>
+                </a:solidFill>
+                <a:latin typeface="Courier"/>
+              </a:rPr>
+              <a:t>data =</a:t>
+            </a:r>
+            <a:r>
+              <a:rPr>
+                <a:solidFill>
+                  <a:srgbClr val="003B4F"/>
+                </a:solidFill>
+                <a:latin typeface="Courier"/>
+              </a:rPr>
+              <a:t> tree_df, </a:t>
+            </a:r>
+            <a:r>
+              <a:rPr>
+                <a:solidFill>
+                  <a:srgbClr val="657422"/>
+                </a:solidFill>
+                <a:latin typeface="Courier"/>
+              </a:rPr>
+              <a:t>var.equal =</a:t>
+            </a:r>
+            <a:r>
+              <a:rPr>
+                <a:solidFill>
+                  <a:srgbClr val="003B4F"/>
+                </a:solidFill>
+                <a:latin typeface="Courier"/>
+              </a:rPr>
+              <a:t> </a:t>
+            </a:r>
+            <a:r>
+              <a:rPr>
+                <a:solidFill>
+                  <a:srgbClr val="8F5902"/>
+                </a:solidFill>
+                <a:latin typeface="Courier"/>
+              </a:rPr>
+              <a:t>FALSE</a:t>
+            </a:r>
+            <a:r>
+              <a:rPr>
+                <a:solidFill>
+                  <a:srgbClr val="003B4F"/>
+                </a:solidFill>
+                <a:latin typeface="Courier"/>
+              </a:rPr>
+              <a:t>)</a:t>
             </a:r>
             <a:r>
               <a:rPr>
@@ -3693,1046 +4084,16 @@
                 </a:solidFill>
                 <a:latin typeface="Courier"/>
               </a:rPr>
-              <a:t>%&gt;%</a:t>
-            </a:r>
-            <a:br/>
-            <a:r>
-              <a:rPr>
-                <a:solidFill>
-                  <a:srgbClr val="003B4F"/>
-                </a:solidFill>
-                <a:latin typeface="Courier"/>
-              </a:rPr>
-              <a:t>  </a:t>
-            </a:r>
-            <a:r>
-              <a:rPr>
-                <a:solidFill>
-                  <a:srgbClr val="4758AB"/>
-                </a:solidFill>
-                <a:latin typeface="Courier"/>
-              </a:rPr>
-              <a:t>summarize</a:t>
-            </a:r>
-            <a:r>
-              <a:rPr>
-                <a:solidFill>
-                  <a:srgbClr val="003B4F"/>
-                </a:solidFill>
-                <a:latin typeface="Courier"/>
-              </a:rPr>
-              <a:t>(</a:t>
-            </a:r>
-            <a:br/>
-            <a:r>
-              <a:rPr>
-                <a:solidFill>
-                  <a:srgbClr val="003B4F"/>
-                </a:solidFill>
-                <a:latin typeface="Courier"/>
-              </a:rPr>
-              <a:t>    </a:t>
-            </a:r>
-            <a:r>
-              <a:rPr>
-                <a:solidFill>
-                  <a:srgbClr val="657422"/>
-                </a:solidFill>
-                <a:latin typeface="Courier"/>
-              </a:rPr>
-              <a:t>n        =</a:t>
-            </a:r>
-            <a:r>
-              <a:rPr>
-                <a:solidFill>
-                  <a:srgbClr val="003B4F"/>
-                </a:solidFill>
-                <a:latin typeface="Courier"/>
-              </a:rPr>
-              <a:t> </a:t>
-            </a:r>
-            <a:r>
-              <a:rPr>
-                <a:solidFill>
-                  <a:srgbClr val="4758AB"/>
-                </a:solidFill>
-                <a:latin typeface="Courier"/>
-              </a:rPr>
-              <a:t>sum</a:t>
-            </a:r>
-            <a:r>
-              <a:rPr>
-                <a:solidFill>
-                  <a:srgbClr val="003B4F"/>
-                </a:solidFill>
-                <a:latin typeface="Courier"/>
-              </a:rPr>
-              <a:t>(</a:t>
-            </a:r>
-            <a:r>
-              <a:rPr>
-                <a:solidFill>
-                  <a:srgbClr val="5E5E5E"/>
-                </a:solidFill>
-                <a:latin typeface="Courier"/>
-              </a:rPr>
-              <a:t>!</a:t>
-            </a:r>
-            <a:r>
-              <a:rPr>
-                <a:solidFill>
-                  <a:srgbClr val="4758AB"/>
-                </a:solidFill>
-                <a:latin typeface="Courier"/>
-              </a:rPr>
-              <a:t>is.na</a:t>
-            </a:r>
-            <a:r>
-              <a:rPr>
-                <a:solidFill>
-                  <a:srgbClr val="003B4F"/>
-                </a:solidFill>
-                <a:latin typeface="Courier"/>
-              </a:rPr>
-              <a:t>(height_cm)),</a:t>
-            </a:r>
-            <a:br/>
-            <a:r>
-              <a:rPr>
-                <a:solidFill>
-                  <a:srgbClr val="003B4F"/>
-                </a:solidFill>
-                <a:latin typeface="Courier"/>
-              </a:rPr>
-              <a:t>    </a:t>
-            </a:r>
-            <a:r>
-              <a:rPr>
-                <a:solidFill>
-                  <a:srgbClr val="657422"/>
-                </a:solidFill>
-                <a:latin typeface="Courier"/>
-              </a:rPr>
-              <a:t>mean_ht  =</a:t>
-            </a:r>
-            <a:r>
-              <a:rPr>
-                <a:solidFill>
-                  <a:srgbClr val="003B4F"/>
-                </a:solidFill>
-                <a:latin typeface="Courier"/>
-              </a:rPr>
-              <a:t> </a:t>
-            </a:r>
-            <a:r>
-              <a:rPr>
-                <a:solidFill>
-                  <a:srgbClr val="4758AB"/>
-                </a:solidFill>
-                <a:latin typeface="Courier"/>
-              </a:rPr>
-              <a:t>round</a:t>
-            </a:r>
-            <a:r>
-              <a:rPr>
-                <a:solidFill>
-                  <a:srgbClr val="003B4F"/>
-                </a:solidFill>
-                <a:latin typeface="Courier"/>
-              </a:rPr>
-              <a:t>(</a:t>
-            </a:r>
-            <a:r>
-              <a:rPr>
-                <a:solidFill>
-                  <a:srgbClr val="4758AB"/>
-                </a:solidFill>
-                <a:latin typeface="Courier"/>
-              </a:rPr>
-              <a:t>mean</a:t>
-            </a:r>
-            <a:r>
-              <a:rPr>
-                <a:solidFill>
-                  <a:srgbClr val="003B4F"/>
-                </a:solidFill>
-                <a:latin typeface="Courier"/>
-              </a:rPr>
-              <a:t>(height_cm, </a:t>
-            </a:r>
-            <a:r>
-              <a:rPr>
-                <a:solidFill>
-                  <a:srgbClr val="657422"/>
-                </a:solidFill>
-                <a:latin typeface="Courier"/>
-              </a:rPr>
-              <a:t>na.rm =</a:t>
-            </a:r>
-            <a:r>
-              <a:rPr>
-                <a:solidFill>
-                  <a:srgbClr val="003B4F"/>
-                </a:solidFill>
-                <a:latin typeface="Courier"/>
-              </a:rPr>
-              <a:t> </a:t>
-            </a:r>
-            <a:r>
-              <a:rPr>
-                <a:solidFill>
-                  <a:srgbClr val="8F5902"/>
-                </a:solidFill>
-                <a:latin typeface="Courier"/>
-              </a:rPr>
-              <a:t>TRUE</a:t>
-            </a:r>
-            <a:r>
-              <a:rPr>
-                <a:solidFill>
-                  <a:srgbClr val="003B4F"/>
-                </a:solidFill>
-                <a:latin typeface="Courier"/>
-              </a:rPr>
-              <a:t>), </a:t>
-            </a:r>
-            <a:r>
-              <a:rPr>
-                <a:solidFill>
-                  <a:srgbClr val="AD0000"/>
-                </a:solidFill>
-                <a:latin typeface="Courier"/>
-              </a:rPr>
-              <a:t>2</a:t>
-            </a:r>
-            <a:r>
-              <a:rPr>
-                <a:solidFill>
-                  <a:srgbClr val="003B4F"/>
-                </a:solidFill>
-                <a:latin typeface="Courier"/>
-              </a:rPr>
-              <a:t>),</a:t>
-            </a:r>
-            <a:br/>
-            <a:r>
-              <a:rPr>
-                <a:solidFill>
-                  <a:srgbClr val="003B4F"/>
-                </a:solidFill>
-                <a:latin typeface="Courier"/>
-              </a:rPr>
-              <a:t>    </a:t>
-            </a:r>
-            <a:r>
-              <a:rPr>
-                <a:solidFill>
-                  <a:srgbClr val="657422"/>
-                </a:solidFill>
-                <a:latin typeface="Courier"/>
-              </a:rPr>
-              <a:t>sd_ht    =</a:t>
-            </a:r>
-            <a:r>
-              <a:rPr>
-                <a:solidFill>
-                  <a:srgbClr val="003B4F"/>
-                </a:solidFill>
-                <a:latin typeface="Courier"/>
-              </a:rPr>
-              <a:t> </a:t>
-            </a:r>
-            <a:r>
-              <a:rPr>
-                <a:solidFill>
-                  <a:srgbClr val="4758AB"/>
-                </a:solidFill>
-                <a:latin typeface="Courier"/>
-              </a:rPr>
-              <a:t>round</a:t>
-            </a:r>
-            <a:r>
-              <a:rPr>
-                <a:solidFill>
-                  <a:srgbClr val="003B4F"/>
-                </a:solidFill>
-                <a:latin typeface="Courier"/>
-              </a:rPr>
-              <a:t>(</a:t>
-            </a:r>
-            <a:r>
-              <a:rPr>
-                <a:solidFill>
-                  <a:srgbClr val="4758AB"/>
-                </a:solidFill>
-                <a:latin typeface="Courier"/>
-              </a:rPr>
-              <a:t>sd</a:t>
-            </a:r>
-            <a:r>
-              <a:rPr>
-                <a:solidFill>
-                  <a:srgbClr val="003B4F"/>
-                </a:solidFill>
-                <a:latin typeface="Courier"/>
-              </a:rPr>
-              <a:t>(height_cm,   </a:t>
-            </a:r>
-            <a:r>
-              <a:rPr>
-                <a:solidFill>
-                  <a:srgbClr val="657422"/>
-                </a:solidFill>
-                <a:latin typeface="Courier"/>
-              </a:rPr>
-              <a:t>na.rm =</a:t>
-            </a:r>
-            <a:r>
-              <a:rPr>
-                <a:solidFill>
-                  <a:srgbClr val="003B4F"/>
-                </a:solidFill>
-                <a:latin typeface="Courier"/>
-              </a:rPr>
-              <a:t> </a:t>
-            </a:r>
-            <a:r>
-              <a:rPr>
-                <a:solidFill>
-                  <a:srgbClr val="8F5902"/>
-                </a:solidFill>
-                <a:latin typeface="Courier"/>
-              </a:rPr>
-              <a:t>TRUE</a:t>
-            </a:r>
-            <a:r>
-              <a:rPr>
-                <a:solidFill>
-                  <a:srgbClr val="003B4F"/>
-                </a:solidFill>
-                <a:latin typeface="Courier"/>
-              </a:rPr>
-              <a:t>), </a:t>
-            </a:r>
-            <a:r>
-              <a:rPr>
-                <a:solidFill>
-                  <a:srgbClr val="AD0000"/>
-                </a:solidFill>
-                <a:latin typeface="Courier"/>
-              </a:rPr>
-              <a:t>2</a:t>
-            </a:r>
-            <a:r>
-              <a:rPr>
-                <a:solidFill>
-                  <a:srgbClr val="003B4F"/>
-                </a:solidFill>
-                <a:latin typeface="Courier"/>
-              </a:rPr>
-              <a:t>),</a:t>
-            </a:r>
-            <a:br/>
-            <a:r>
-              <a:rPr>
-                <a:solidFill>
-                  <a:srgbClr val="003B4F"/>
-                </a:solidFill>
-                <a:latin typeface="Courier"/>
-              </a:rPr>
-              <a:t>    </a:t>
-            </a:r>
-            <a:r>
-              <a:rPr>
-                <a:solidFill>
-                  <a:srgbClr val="657422"/>
-                </a:solidFill>
-                <a:latin typeface="Courier"/>
-              </a:rPr>
-              <a:t>se_ht    =</a:t>
-            </a:r>
-            <a:r>
-              <a:rPr>
-                <a:solidFill>
-                  <a:srgbClr val="003B4F"/>
-                </a:solidFill>
-                <a:latin typeface="Courier"/>
-              </a:rPr>
-              <a:t> </a:t>
-            </a:r>
-            <a:r>
-              <a:rPr>
-                <a:solidFill>
-                  <a:srgbClr val="4758AB"/>
-                </a:solidFill>
-                <a:latin typeface="Courier"/>
-              </a:rPr>
-              <a:t>round</a:t>
-            </a:r>
-            <a:r>
-              <a:rPr>
-                <a:solidFill>
-                  <a:srgbClr val="003B4F"/>
-                </a:solidFill>
-                <a:latin typeface="Courier"/>
-              </a:rPr>
-              <a:t>(sd_ht </a:t>
-            </a:r>
-            <a:r>
-              <a:rPr>
-                <a:solidFill>
-                  <a:srgbClr val="5E5E5E"/>
-                </a:solidFill>
-                <a:latin typeface="Courier"/>
-              </a:rPr>
-              <a:t>/</a:t>
-            </a:r>
-            <a:r>
-              <a:rPr>
-                <a:solidFill>
-                  <a:srgbClr val="003B4F"/>
-                </a:solidFill>
-                <a:latin typeface="Courier"/>
-              </a:rPr>
-              <a:t> </a:t>
-            </a:r>
-            <a:r>
-              <a:rPr>
-                <a:solidFill>
-                  <a:srgbClr val="4758AB"/>
-                </a:solidFill>
-                <a:latin typeface="Courier"/>
-              </a:rPr>
-              <a:t>sqrt</a:t>
-            </a:r>
-            <a:r>
-              <a:rPr>
-                <a:solidFill>
-                  <a:srgbClr val="003B4F"/>
-                </a:solidFill>
-                <a:latin typeface="Courier"/>
-              </a:rPr>
-              <a:t>(n), </a:t>
-            </a:r>
-            <a:r>
-              <a:rPr>
-                <a:solidFill>
-                  <a:srgbClr val="AD0000"/>
-                </a:solidFill>
-                <a:latin typeface="Courier"/>
-              </a:rPr>
-              <a:t>2</a:t>
-            </a:r>
-            <a:r>
-              <a:rPr>
-                <a:solidFill>
-                  <a:srgbClr val="003B4F"/>
-                </a:solidFill>
-                <a:latin typeface="Courier"/>
-              </a:rPr>
-              <a:t>)</a:t>
-            </a:r>
-            <a:br/>
-            <a:r>
-              <a:rPr>
-                <a:solidFill>
-                  <a:srgbClr val="003B4F"/>
-                </a:solidFill>
-                <a:latin typeface="Courier"/>
-              </a:rPr>
-              <a:t>  )</a:t>
-            </a:r>
-          </a:p>
-          <a:p>
-            <a:pPr lvl="0" indent="0">
-              <a:buNone/>
-            </a:pPr>
-            <a:r>
-              <a:rPr>
-                <a:solidFill>
-                  <a:srgbClr val="5E5E5E"/>
-                </a:solidFill>
-                <a:latin typeface="Courier"/>
-              </a:rPr>
-              <a:t># 2. Shapiro-Wilk for height_cm</a:t>
-            </a:r>
-            <a:br/>
-            <a:r>
-              <a:rPr>
-                <a:solidFill>
-                  <a:srgbClr val="003B4F"/>
-                </a:solidFill>
-                <a:latin typeface="Courier"/>
-              </a:rPr>
-              <a:t>tree_df </a:t>
-            </a:r>
-            <a:r>
-              <a:rPr>
-                <a:solidFill>
-                  <a:srgbClr val="5E5E5E"/>
-                </a:solidFill>
-                <a:latin typeface="Courier"/>
-              </a:rPr>
-              <a:t>%&gt;%</a:t>
-            </a:r>
-            <a:r>
-              <a:rPr>
-                <a:solidFill>
-                  <a:srgbClr val="003B4F"/>
-                </a:solidFill>
-                <a:latin typeface="Courier"/>
-              </a:rPr>
-              <a:t> </a:t>
-            </a:r>
-            <a:r>
-              <a:rPr>
-                <a:solidFill>
-                  <a:srgbClr val="4758AB"/>
-                </a:solidFill>
-                <a:latin typeface="Courier"/>
-              </a:rPr>
-              <a:t>filter</a:t>
-            </a:r>
-            <a:r>
-              <a:rPr>
-                <a:solidFill>
-                  <a:srgbClr val="003B4F"/>
-                </a:solidFill>
-                <a:latin typeface="Courier"/>
-              </a:rPr>
-              <a:t>(side </a:t>
-            </a:r>
-            <a:r>
-              <a:rPr>
-                <a:solidFill>
-                  <a:srgbClr val="5E5E5E"/>
-                </a:solidFill>
-                <a:latin typeface="Courier"/>
-              </a:rPr>
-              <a:t>==</a:t>
-            </a:r>
-            <a:r>
-              <a:rPr>
-                <a:solidFill>
-                  <a:srgbClr val="003B4F"/>
-                </a:solidFill>
-                <a:latin typeface="Courier"/>
-              </a:rPr>
-              <a:t> </a:t>
-            </a:r>
-            <a:r>
-              <a:rPr>
-                <a:solidFill>
-                  <a:srgbClr val="20794D"/>
-                </a:solidFill>
-                <a:latin typeface="Courier"/>
-              </a:rPr>
-              <a:t>"sunny"</a:t>
-            </a:r>
-            <a:r>
-              <a:rPr>
-                <a:solidFill>
-                  <a:srgbClr val="003B4F"/>
-                </a:solidFill>
-                <a:latin typeface="Courier"/>
-              </a:rPr>
-              <a:t>) </a:t>
-            </a:r>
-            <a:r>
-              <a:rPr>
-                <a:solidFill>
-                  <a:srgbClr val="5E5E5E"/>
-                </a:solidFill>
-                <a:latin typeface="Courier"/>
-              </a:rPr>
-              <a:t>%&gt;%</a:t>
-            </a:r>
-            <a:r>
-              <a:rPr>
-                <a:solidFill>
-                  <a:srgbClr val="003B4F"/>
-                </a:solidFill>
-                <a:latin typeface="Courier"/>
-              </a:rPr>
-              <a:t> </a:t>
-            </a:r>
-            <a:r>
-              <a:rPr>
-                <a:solidFill>
-                  <a:srgbClr val="4758AB"/>
-                </a:solidFill>
-                <a:latin typeface="Courier"/>
-              </a:rPr>
-              <a:t>pull</a:t>
-            </a:r>
-            <a:r>
-              <a:rPr>
-                <a:solidFill>
-                  <a:srgbClr val="003B4F"/>
-                </a:solidFill>
-                <a:latin typeface="Courier"/>
-              </a:rPr>
-              <a:t>(height_cm) </a:t>
-            </a:r>
-            <a:r>
-              <a:rPr>
-                <a:solidFill>
-                  <a:srgbClr val="5E5E5E"/>
-                </a:solidFill>
-                <a:latin typeface="Courier"/>
-              </a:rPr>
-              <a:t>%&gt;%</a:t>
-            </a:r>
-            <a:r>
-              <a:rPr>
-                <a:solidFill>
-                  <a:srgbClr val="003B4F"/>
-                </a:solidFill>
-                <a:latin typeface="Courier"/>
-              </a:rPr>
-              <a:t> </a:t>
-            </a:r>
-            <a:r>
-              <a:rPr>
-                <a:solidFill>
-                  <a:srgbClr val="4758AB"/>
-                </a:solidFill>
-                <a:latin typeface="Courier"/>
-              </a:rPr>
-              <a:t>shapiro.test</a:t>
-            </a:r>
-            <a:r>
-              <a:rPr>
-                <a:solidFill>
-                  <a:srgbClr val="003B4F"/>
-                </a:solidFill>
-                <a:latin typeface="Courier"/>
-              </a:rPr>
-              <a:t>()</a:t>
-            </a:r>
-            <a:br/>
-            <a:r>
-              <a:rPr>
-                <a:solidFill>
-                  <a:srgbClr val="003B4F"/>
-                </a:solidFill>
-                <a:latin typeface="Courier"/>
-              </a:rPr>
-              <a:t>tree_df </a:t>
-            </a:r>
-            <a:r>
-              <a:rPr>
-                <a:solidFill>
-                  <a:srgbClr val="5E5E5E"/>
-                </a:solidFill>
-                <a:latin typeface="Courier"/>
-              </a:rPr>
-              <a:t>%&gt;%</a:t>
-            </a:r>
-            <a:r>
-              <a:rPr>
-                <a:solidFill>
-                  <a:srgbClr val="003B4F"/>
-                </a:solidFill>
-                <a:latin typeface="Courier"/>
-              </a:rPr>
-              <a:t> </a:t>
-            </a:r>
-            <a:r>
-              <a:rPr>
-                <a:solidFill>
-                  <a:srgbClr val="4758AB"/>
-                </a:solidFill>
-                <a:latin typeface="Courier"/>
-              </a:rPr>
-              <a:t>filter</a:t>
-            </a:r>
-            <a:r>
-              <a:rPr>
-                <a:solidFill>
-                  <a:srgbClr val="003B4F"/>
-                </a:solidFill>
-                <a:latin typeface="Courier"/>
-              </a:rPr>
-              <a:t>(side </a:t>
-            </a:r>
-            <a:r>
-              <a:rPr>
-                <a:solidFill>
-                  <a:srgbClr val="5E5E5E"/>
-                </a:solidFill>
-                <a:latin typeface="Courier"/>
-              </a:rPr>
-              <a:t>==</a:t>
-            </a:r>
-            <a:r>
-              <a:rPr>
-                <a:solidFill>
-                  <a:srgbClr val="003B4F"/>
-                </a:solidFill>
-                <a:latin typeface="Courier"/>
-              </a:rPr>
-              <a:t> </a:t>
-            </a:r>
-            <a:r>
-              <a:rPr>
-                <a:solidFill>
-                  <a:srgbClr val="20794D"/>
-                </a:solidFill>
-                <a:latin typeface="Courier"/>
-              </a:rPr>
-              <a:t>"shady"</a:t>
-            </a:r>
-            <a:r>
-              <a:rPr>
-                <a:solidFill>
-                  <a:srgbClr val="003B4F"/>
-                </a:solidFill>
-                <a:latin typeface="Courier"/>
-              </a:rPr>
-              <a:t>) </a:t>
-            </a:r>
-            <a:r>
-              <a:rPr>
-                <a:solidFill>
-                  <a:srgbClr val="5E5E5E"/>
-                </a:solidFill>
-                <a:latin typeface="Courier"/>
-              </a:rPr>
-              <a:t>%&gt;%</a:t>
-            </a:r>
-            <a:r>
-              <a:rPr>
-                <a:solidFill>
-                  <a:srgbClr val="003B4F"/>
-                </a:solidFill>
-                <a:latin typeface="Courier"/>
-              </a:rPr>
-              <a:t> </a:t>
-            </a:r>
-            <a:r>
-              <a:rPr>
-                <a:solidFill>
-                  <a:srgbClr val="4758AB"/>
-                </a:solidFill>
-                <a:latin typeface="Courier"/>
-              </a:rPr>
-              <a:t>pull</a:t>
-            </a:r>
-            <a:r>
-              <a:rPr>
-                <a:solidFill>
-                  <a:srgbClr val="003B4F"/>
-                </a:solidFill>
-                <a:latin typeface="Courier"/>
-              </a:rPr>
-              <a:t>(height_cm) </a:t>
-            </a:r>
-            <a:r>
-              <a:rPr>
-                <a:solidFill>
-                  <a:srgbClr val="5E5E5E"/>
-                </a:solidFill>
-                <a:latin typeface="Courier"/>
-              </a:rPr>
-              <a:t>%&gt;%</a:t>
-            </a:r>
-            <a:r>
-              <a:rPr>
-                <a:solidFill>
-                  <a:srgbClr val="003B4F"/>
-                </a:solidFill>
-                <a:latin typeface="Courier"/>
-              </a:rPr>
-              <a:t> </a:t>
-            </a:r>
-            <a:r>
-              <a:rPr>
-                <a:solidFill>
-                  <a:srgbClr val="4758AB"/>
-                </a:solidFill>
-                <a:latin typeface="Courier"/>
-              </a:rPr>
-              <a:t>shapiro.test</a:t>
-            </a:r>
-            <a:r>
-              <a:rPr>
-                <a:solidFill>
-                  <a:srgbClr val="003B4F"/>
-                </a:solidFill>
-                <a:latin typeface="Courier"/>
-              </a:rPr>
-              <a:t>()</a:t>
-            </a:r>
-          </a:p>
-          <a:p>
-            <a:pPr lvl="0" indent="0">
-              <a:buNone/>
-            </a:pPr>
-            <a:r>
-              <a:rPr>
-                <a:solidFill>
-                  <a:srgbClr val="5E5E5E"/>
-                </a:solidFill>
-                <a:latin typeface="Courier"/>
-              </a:rPr>
-              <a:t># 3. Levene's test for height_cm</a:t>
-            </a:r>
-            <a:br/>
-            <a:r>
-              <a:rPr>
-                <a:solidFill>
-                  <a:srgbClr val="4758AB"/>
-                </a:solidFill>
-                <a:latin typeface="Courier"/>
-              </a:rPr>
-              <a:t>leveneTest</a:t>
-            </a:r>
-            <a:r>
-              <a:rPr>
-                <a:solidFill>
-                  <a:srgbClr val="003B4F"/>
-                </a:solidFill>
-                <a:latin typeface="Courier"/>
-              </a:rPr>
-              <a:t>(height_cm </a:t>
-            </a:r>
-            <a:r>
-              <a:rPr>
-                <a:solidFill>
-                  <a:srgbClr val="5E5E5E"/>
-                </a:solidFill>
-                <a:latin typeface="Courier"/>
-              </a:rPr>
-              <a:t>~</a:t>
-            </a:r>
-            <a:r>
-              <a:rPr>
-                <a:solidFill>
-                  <a:srgbClr val="003B4F"/>
-                </a:solidFill>
-                <a:latin typeface="Courier"/>
-              </a:rPr>
-              <a:t> side, </a:t>
-            </a:r>
-            <a:r>
-              <a:rPr>
-                <a:solidFill>
-                  <a:srgbClr val="657422"/>
-                </a:solidFill>
-                <a:latin typeface="Courier"/>
-              </a:rPr>
-              <a:t>data =</a:t>
-            </a:r>
-            <a:r>
-              <a:rPr>
-                <a:solidFill>
-                  <a:srgbClr val="003B4F"/>
-                </a:solidFill>
-                <a:latin typeface="Courier"/>
-              </a:rPr>
-              <a:t> tree_df)</a:t>
-            </a:r>
-          </a:p>
-          <a:p>
-            <a:pPr lvl="0" indent="0">
-              <a:buNone/>
-            </a:pPr>
-            <a:r>
-              <a:rPr>
-                <a:solidFill>
-                  <a:srgbClr val="5E5E5E"/>
-                </a:solidFill>
-                <a:latin typeface="Courier"/>
-              </a:rPr>
-              <a:t># 4. Welch's t-test for height_cm</a:t>
-            </a:r>
-            <a:br/>
-            <a:r>
-              <a:rPr>
-                <a:solidFill>
-                  <a:srgbClr val="003B4F"/>
-                </a:solidFill>
-                <a:latin typeface="Courier"/>
-              </a:rPr>
-              <a:t>height_ttest_model &lt;- </a:t>
-            </a:r>
-            <a:r>
-              <a:rPr>
-                <a:solidFill>
-                  <a:srgbClr val="4758AB"/>
-                </a:solidFill>
-                <a:latin typeface="Courier"/>
-              </a:rPr>
-              <a:t>t.test</a:t>
-            </a:r>
-            <a:r>
-              <a:rPr>
-                <a:solidFill>
-                  <a:srgbClr val="003B4F"/>
-                </a:solidFill>
-                <a:latin typeface="Courier"/>
-              </a:rPr>
-              <a:t>(</a:t>
-            </a:r>
-            <a:br/>
-            <a:r>
-              <a:rPr>
-                <a:solidFill>
-                  <a:srgbClr val="003B4F"/>
-                </a:solidFill>
-                <a:latin typeface="Courier"/>
-              </a:rPr>
-              <a:t>  height_cm </a:t>
-            </a:r>
-            <a:r>
-              <a:rPr>
-                <a:solidFill>
-                  <a:srgbClr val="5E5E5E"/>
-                </a:solidFill>
-                <a:latin typeface="Courier"/>
-              </a:rPr>
-              <a:t>~</a:t>
-            </a:r>
-            <a:r>
-              <a:rPr>
-                <a:solidFill>
-                  <a:srgbClr val="003B4F"/>
-                </a:solidFill>
-                <a:latin typeface="Courier"/>
-              </a:rPr>
-              <a:t> side,</a:t>
-            </a:r>
-            <a:br/>
-            <a:r>
-              <a:rPr>
-                <a:solidFill>
-                  <a:srgbClr val="003B4F"/>
-                </a:solidFill>
-                <a:latin typeface="Courier"/>
-              </a:rPr>
-              <a:t>  </a:t>
-            </a:r>
-            <a:r>
-              <a:rPr>
-                <a:solidFill>
-                  <a:srgbClr val="657422"/>
-                </a:solidFill>
-                <a:latin typeface="Courier"/>
-              </a:rPr>
-              <a:t>data        =</a:t>
-            </a:r>
-            <a:r>
-              <a:rPr>
-                <a:solidFill>
-                  <a:srgbClr val="003B4F"/>
-                </a:solidFill>
-                <a:latin typeface="Courier"/>
-              </a:rPr>
-              <a:t> tree_df,</a:t>
-            </a:r>
-            <a:br/>
-            <a:r>
-              <a:rPr>
-                <a:solidFill>
-                  <a:srgbClr val="003B4F"/>
-                </a:solidFill>
-                <a:latin typeface="Courier"/>
-              </a:rPr>
-              <a:t>  </a:t>
-            </a:r>
-            <a:r>
-              <a:rPr>
-                <a:solidFill>
-                  <a:srgbClr val="657422"/>
-                </a:solidFill>
-                <a:latin typeface="Courier"/>
-              </a:rPr>
-              <a:t>var.equal   =</a:t>
-            </a:r>
-            <a:r>
-              <a:rPr>
-                <a:solidFill>
-                  <a:srgbClr val="003B4F"/>
-                </a:solidFill>
-                <a:latin typeface="Courier"/>
-              </a:rPr>
-              <a:t> </a:t>
-            </a:r>
-            <a:r>
-              <a:rPr>
-                <a:solidFill>
-                  <a:srgbClr val="8F5902"/>
-                </a:solidFill>
-                <a:latin typeface="Courier"/>
-              </a:rPr>
-              <a:t>FALSE</a:t>
-            </a:r>
-            <a:r>
-              <a:rPr>
-                <a:solidFill>
-                  <a:srgbClr val="003B4F"/>
-                </a:solidFill>
-                <a:latin typeface="Courier"/>
-              </a:rPr>
-              <a:t>,</a:t>
-            </a:r>
-            <a:br/>
-            <a:r>
-              <a:rPr>
-                <a:solidFill>
-                  <a:srgbClr val="003B4F"/>
-                </a:solidFill>
-                <a:latin typeface="Courier"/>
-              </a:rPr>
-              <a:t>  </a:t>
-            </a:r>
-            <a:r>
-              <a:rPr>
-                <a:solidFill>
-                  <a:srgbClr val="657422"/>
-                </a:solidFill>
-                <a:latin typeface="Courier"/>
-              </a:rPr>
-              <a:t>alternative =</a:t>
-            </a:r>
-            <a:r>
-              <a:rPr>
-                <a:solidFill>
-                  <a:srgbClr val="003B4F"/>
-                </a:solidFill>
-                <a:latin typeface="Courier"/>
-              </a:rPr>
-              <a:t> </a:t>
-            </a:r>
-            <a:r>
-              <a:rPr>
-                <a:solidFill>
-                  <a:srgbClr val="20794D"/>
-                </a:solidFill>
-                <a:latin typeface="Courier"/>
-              </a:rPr>
-              <a:t>"two.sided"</a:t>
-            </a:r>
-            <a:br/>
-            <a:r>
-              <a:rPr>
-                <a:solidFill>
-                  <a:srgbClr val="003B4F"/>
-                </a:solidFill>
-                <a:latin typeface="Courier"/>
-              </a:rPr>
-              <a:t>)</a:t>
-            </a:r>
-            <a:br/>
-            <a:r>
-              <a:rPr>
-                <a:solidFill>
-                  <a:srgbClr val="003B4F"/>
-                </a:solidFill>
-                <a:latin typeface="Courier"/>
-              </a:rPr>
-              <a:t>height_ttest_model</a:t>
+              <a:t>$</a:t>
+            </a:r>
+            <a:r>
+              <a:rPr>
+                <a:solidFill>
+                  <a:srgbClr val="003B4F"/>
+                </a:solidFill>
+                <a:latin typeface="Courier"/>
+              </a:rPr>
+              <a:t>p.value</a:t>
             </a:r>
           </a:p>
           <a:p>
@@ -4745,11 +4106,7 @@
             </a:r>
             <a:r>
               <a:rPr b="1"/>
-              <a:t>Your turn:</a:t>
-            </a:r>
-            <a:r>
-              <a:rPr/>
-              <a:t> Is leaf height also significantly different between sides? Fill in the results:</a:t>
+              <a:t>Record:</a:t>
             </a:r>
           </a:p>
           <a:p>
@@ -4760,9 +4117,12 @@
               <a:rPr>
                 <a:latin typeface="Courier"/>
               </a:rPr>
-              <a:t>t = _____   df = _____   p = _____
-Decision:
-One-sentence conclusion:</a:t>
+              <a:t>Variable chosen:
+Directional Ha (in symbols):
+One-tailed p-value:
+Two-tailed p-value:
+Ratio (two-tailed / one-tailed) ≈
+Decision at alpha = 0.05:</a:t>
             </a:r>
           </a:p>
           <a:p>
@@ -4774,7 +4134,7 @@
             </a:pPr>
             <a:r>
               <a:rPr b="1"/>
-              <a:t>Change the confidence level</a:t>
+              <a:t>E2 · Predict, then check — ✍️ by hand (3 pts)</a:t>
             </a:r>
           </a:p>
           <a:p>
@@ -4782,313 +4142,200 @@
               <a:buNone/>
             </a:pPr>
             <a:r>
+              <a:rPr b="1"/>
+              <a:t>Before running E1</a:t>
+            </a:r>
+            <a:r>
               <a:rPr/>
-              <a:t>By default </a:t>
-            </a:r>
-            <a:r>
-              <a:rPr>
+              <a:t>, on paper:</a:t>
+            </a:r>
+          </a:p>
+          <a:p>
+            <a:pPr lvl="0" indent="-342900" marL="342900">
+              <a:buAutoNum type="arabicPeriod"/>
+            </a:pPr>
+            <a:r>
+              <a:rPr/>
+              <a:t>Predict the relationship between the one-tailed and two-tailed </a:t>
+            </a:r>
+            <a:r>
+              <a:rPr i="1"/>
+              <a:t>p</a:t>
+            </a:r>
+            <a:r>
+              <a:rPr/>
+              <a:t>-values for the same data. Which is smaller, and roughly by how much?</a:t>
+            </a:r>
+          </a:p>
+          <a:p>
+            <a:pPr lvl="0" indent="-342900" marL="342900">
+              <a:buAutoNum type="arabicPeriod"/>
+            </a:pPr>
+            <a:r>
+              <a:rPr/>
+              <a:t>Predict whether your chosen variable will differ significantly between sides, and why.</a:t>
+            </a:r>
+          </a:p>
+          <a:p>
+            <a:pPr lvl="0" indent="0" marL="0">
+              <a:buNone/>
+            </a:pPr>
+            <a:r>
+              <a:rPr/>
+              <a:t>Then run E1 and, by hand, write your actual one- and two-tailed </a:t>
+            </a:r>
+            <a:r>
+              <a:rPr i="1"/>
+              <a:t>p</a:t>
+            </a:r>
+            <a:r>
+              <a:rPr/>
+              <a:t>-values and whether your predictions held.</a:t>
+            </a:r>
+          </a:p>
+          <a:p>
+            <a:pPr lvl="0" indent="0" marL="0">
+              <a:spcBef>
+                <a:spcPts val="3000"/>
+              </a:spcBef>
+              <a:buNone/>
+            </a:pPr>
+            <a:r>
+              <a:rPr b="1"/>
+              <a:t>E3 · Explain it — ✍️ by hand, with YOUR numbers (3 pts)</a:t>
+            </a:r>
+          </a:p>
+          <a:p>
+            <a:pPr lvl="0" indent="0" marL="0">
+              <a:buNone/>
+            </a:pPr>
+            <a:r>
+              <a:rPr/>
+              <a:t>Using your real output:</a:t>
+            </a:r>
+          </a:p>
+          <a:p>
+            <a:pPr lvl="0" indent="-342900" marL="342900">
+              <a:buAutoNum type="arabicPeriod"/>
+            </a:pPr>
+            <a:r>
+              <a:rPr/>
+              <a:t>Explain </a:t>
+            </a:r>
+            <a:r>
+              <a:rPr i="1"/>
+              <a:t>why</a:t>
+            </a:r>
+            <a:r>
+              <a:rPr/>
+              <a:t> the one-tailed </a:t>
+            </a:r>
+            <a:r>
+              <a:rPr i="1"/>
+              <a:t>p</a:t>
+            </a:r>
+            <a:r>
+              <a:rPr/>
+              <a:t>-value is (about) half the two-tailed one — in terms of where the rejection region sits on the </a:t>
+            </a:r>
+            <a:r>
+              <a:rPr i="1"/>
+              <a:t>t</a:t>
+            </a:r>
+            <a:r>
+              <a:rPr/>
+              <a:t> distribution.</a:t>
+            </a:r>
+          </a:p>
+          <a:p>
+            <a:pPr lvl="0" indent="-342900" marL="342900">
+              <a:buAutoNum type="arabicPeriod"/>
+            </a:pPr>
+            <a:r>
+              <a:rPr/>
+              <a:t>A one-tailed test is only legitimate if the direction was chosen </a:t>
+            </a:r>
+            <a:r>
+              <a:rPr b="1"/>
+              <a:t>before</a:t>
+            </a:r>
+            <a:r>
+              <a:rPr/>
+              <a:t> seeing the data. Explain, in plain language, what goes wrong if a researcher runs a two-tailed test, sees </a:t>
+            </a:r>
+            <a:r>
+              <a:rPr i="1"/>
+              <a:t>p</a:t>
+            </a:r>
+            <a:r>
+              <a:rPr/>
+              <a:t> = 0.08, and then switches to the one-tailed test that “works”.</a:t>
+            </a:r>
+          </a:p>
+          <a:p>
+            <a:pPr lvl="0" indent="-342900" marL="342900">
+              <a:buAutoNum type="arabicPeriod"/>
+            </a:pPr>
+            <a:r>
+              <a:rPr/>
+              <a:t>If your one-tailed result is significant but the two-tailed result is not, which would you report in a paper, and why?</a:t>
+            </a:r>
+          </a:p>
+          <a:p>
+            <a:pPr lvl="0" indent="0" marL="1270000">
+              <a:buNone/>
+            </a:pPr>
+            <a:r>
+              <a:rPr sz="2000"/>
+              <a:t>Optional, no points: rerun E1 with </a:t>
+            </a:r>
+            <a:r>
+              <a:rPr sz="2000">
+                <a:latin typeface="Courier"/>
+              </a:rPr>
+              <a:t>conf.level = 0.99</a:t>
+            </a:r>
+            <a:r>
+              <a:rPr sz="2000"/>
+              <a:t> and note how the CI changes — and why a one-tailed </a:t>
+            </a:r>
+            <a:r>
+              <a:rPr sz="2000">
                 <a:latin typeface="Courier"/>
               </a:rPr>
               <a:t>t.test()</a:t>
             </a:r>
             <a:r>
-              <a:rPr/>
-              <a:t> reports a 95% CI (</a:t>
-            </a:r>
-            <a:r>
-              <a:rPr>
-                <a:latin typeface="Courier"/>
-              </a:rPr>
-              <a:t>conf.level = 0.95</a:t>
-            </a:r>
-            <a:r>
-              <a:rPr/>
-              <a:t>). Try 99%:</a:t>
-            </a:r>
-          </a:p>
-          <a:p>
-            <a:pPr lvl="0" indent="0" marL="0">
-              <a:buNone/>
-            </a:pPr>
-            <a:r>
-              <a:rPr b="1"/>
-              <a:t>▶ Try this:</a:t>
-            </a:r>
-          </a:p>
-          <a:p>
-            <a:pPr lvl="0" indent="0">
-              <a:buNone/>
-            </a:pPr>
-            <a:r>
-              <a:rPr>
-                <a:solidFill>
-                  <a:srgbClr val="5E5E5E"/>
-                </a:solidFill>
-                <a:latin typeface="Courier"/>
-              </a:rPr>
-              <a:t># Run the weight t-test with 99% confidence interval --</a:t>
-            </a:r>
-            <a:br/>
-            <a:r>
-              <a:rPr>
-                <a:solidFill>
-                  <a:srgbClr val="4758AB"/>
-                </a:solidFill>
-                <a:latin typeface="Courier"/>
-              </a:rPr>
-              <a:t>t.test</a:t>
-            </a:r>
-            <a:r>
-              <a:rPr>
-                <a:solidFill>
-                  <a:srgbClr val="003B4F"/>
-                </a:solidFill>
-                <a:latin typeface="Courier"/>
-              </a:rPr>
-              <a:t>(</a:t>
-            </a:r>
-            <a:br/>
-            <a:r>
-              <a:rPr>
-                <a:solidFill>
-                  <a:srgbClr val="003B4F"/>
-                </a:solidFill>
-                <a:latin typeface="Courier"/>
-              </a:rPr>
-              <a:t>  weight_g </a:t>
-            </a:r>
-            <a:r>
-              <a:rPr>
-                <a:solidFill>
-                  <a:srgbClr val="5E5E5E"/>
-                </a:solidFill>
-                <a:latin typeface="Courier"/>
-              </a:rPr>
-              <a:t>~</a:t>
-            </a:r>
-            <a:r>
-              <a:rPr>
-                <a:solidFill>
-                  <a:srgbClr val="003B4F"/>
-                </a:solidFill>
-                <a:latin typeface="Courier"/>
-              </a:rPr>
-              <a:t> side,</a:t>
-            </a:r>
-            <a:br/>
-            <a:r>
-              <a:rPr>
-                <a:solidFill>
-                  <a:srgbClr val="003B4F"/>
-                </a:solidFill>
-                <a:latin typeface="Courier"/>
-              </a:rPr>
-              <a:t>  </a:t>
-            </a:r>
-            <a:r>
-              <a:rPr>
-                <a:solidFill>
-                  <a:srgbClr val="657422"/>
-                </a:solidFill>
-                <a:latin typeface="Courier"/>
-              </a:rPr>
-              <a:t>data       =</a:t>
-            </a:r>
-            <a:r>
-              <a:rPr>
-                <a:solidFill>
-                  <a:srgbClr val="003B4F"/>
-                </a:solidFill>
-                <a:latin typeface="Courier"/>
-              </a:rPr>
-              <a:t> tree_df,</a:t>
-            </a:r>
-            <a:br/>
-            <a:r>
-              <a:rPr>
-                <a:solidFill>
-                  <a:srgbClr val="003B4F"/>
-                </a:solidFill>
-                <a:latin typeface="Courier"/>
-              </a:rPr>
-              <a:t>  </a:t>
-            </a:r>
-            <a:r>
-              <a:rPr>
-                <a:solidFill>
-                  <a:srgbClr val="657422"/>
-                </a:solidFill>
-                <a:latin typeface="Courier"/>
-              </a:rPr>
-              <a:t>var.equal  =</a:t>
-            </a:r>
-            <a:r>
-              <a:rPr>
-                <a:solidFill>
-                  <a:srgbClr val="003B4F"/>
-                </a:solidFill>
-                <a:latin typeface="Courier"/>
-              </a:rPr>
-              <a:t> </a:t>
-            </a:r>
-            <a:r>
-              <a:rPr>
-                <a:solidFill>
-                  <a:srgbClr val="8F5902"/>
-                </a:solidFill>
-                <a:latin typeface="Courier"/>
-              </a:rPr>
-              <a:t>FALSE</a:t>
-            </a:r>
-            <a:r>
-              <a:rPr>
-                <a:solidFill>
-                  <a:srgbClr val="003B4F"/>
-                </a:solidFill>
-                <a:latin typeface="Courier"/>
-              </a:rPr>
-              <a:t>,</a:t>
-            </a:r>
-            <a:br/>
-            <a:r>
-              <a:rPr>
-                <a:solidFill>
-                  <a:srgbClr val="003B4F"/>
-                </a:solidFill>
-                <a:latin typeface="Courier"/>
-              </a:rPr>
-              <a:t>  </a:t>
-            </a:r>
-            <a:r>
-              <a:rPr>
-                <a:solidFill>
-                  <a:srgbClr val="657422"/>
-                </a:solidFill>
-                <a:latin typeface="Courier"/>
-              </a:rPr>
-              <a:t>alternative =</a:t>
-            </a:r>
-            <a:r>
-              <a:rPr>
-                <a:solidFill>
-                  <a:srgbClr val="003B4F"/>
-                </a:solidFill>
-                <a:latin typeface="Courier"/>
-              </a:rPr>
-              <a:t> </a:t>
-            </a:r>
-            <a:r>
-              <a:rPr>
-                <a:solidFill>
-                  <a:srgbClr val="20794D"/>
-                </a:solidFill>
-                <a:latin typeface="Courier"/>
-              </a:rPr>
-              <a:t>"two.sided"</a:t>
-            </a:r>
-            <a:r>
-              <a:rPr>
-                <a:solidFill>
-                  <a:srgbClr val="003B4F"/>
-                </a:solidFill>
-                <a:latin typeface="Courier"/>
-              </a:rPr>
-              <a:t>,</a:t>
-            </a:r>
-            <a:br/>
-            <a:r>
-              <a:rPr>
-                <a:solidFill>
-                  <a:srgbClr val="003B4F"/>
-                </a:solidFill>
-                <a:latin typeface="Courier"/>
-              </a:rPr>
-              <a:t>  </a:t>
-            </a:r>
-            <a:r>
-              <a:rPr>
-                <a:solidFill>
-                  <a:srgbClr val="657422"/>
-                </a:solidFill>
-                <a:latin typeface="Courier"/>
-              </a:rPr>
-              <a:t>conf.level  =</a:t>
-            </a:r>
-            <a:r>
-              <a:rPr>
-                <a:solidFill>
-                  <a:srgbClr val="003B4F"/>
-                </a:solidFill>
-                <a:latin typeface="Courier"/>
-              </a:rPr>
-              <a:t> </a:t>
-            </a:r>
-            <a:r>
-              <a:rPr>
-                <a:solidFill>
-                  <a:srgbClr val="AD0000"/>
-                </a:solidFill>
-                <a:latin typeface="Courier"/>
-              </a:rPr>
-              <a:t>0.99</a:t>
-            </a:r>
-            <a:r>
-              <a:rPr>
-                <a:solidFill>
-                  <a:srgbClr val="003B4F"/>
-                </a:solidFill>
-                <a:latin typeface="Courier"/>
-              </a:rPr>
-              <a:t>        </a:t>
-            </a:r>
-            <a:r>
-              <a:rPr>
-                <a:solidFill>
-                  <a:srgbClr val="5E5E5E"/>
-                </a:solidFill>
-                <a:latin typeface="Courier"/>
-              </a:rPr>
-              <a:t># 99% CI instead of 95%</a:t>
-            </a:r>
-            <a:br/>
-            <a:r>
-              <a:rPr>
-                <a:solidFill>
-                  <a:srgbClr val="003B4F"/>
-                </a:solidFill>
-                <a:latin typeface="Courier"/>
-              </a:rPr>
-              <a:t>)</a:t>
-            </a:r>
-          </a:p>
-          <a:p>
-            <a:pPr lvl="0" indent="0" marL="0">
-              <a:buNone/>
-            </a:pPr>
-            <a:r>
-              <a:rPr/>
-              <a:t>✏️ </a:t>
-            </a:r>
-            <a:r>
-              <a:rPr b="1"/>
-              <a:t>Your turn:</a:t>
-            </a:r>
-            <a:r>
-              <a:rPr/>
-              <a:t> How did the 99% CI compare to the 95% CI? Why is the 99% CI wider?</a:t>
-            </a:r>
-          </a:p>
-          <a:p>
-            <a:pPr lvl="0" indent="0">
-              <a:buNone/>
-            </a:pPr>
-            <a:r>
-              <a:rPr>
-                <a:latin typeface="Courier"/>
-              </a:rPr>
-              <a:t>95% CI was: _____ to _____
-99% CI was: _____ to _____
-Why wider:</a:t>
+              <a:rPr sz="2000"/>
+              <a:t> reports a </a:t>
+            </a:r>
+            <a:r>
+              <a:rPr sz="2000" b="1"/>
+              <a:t>one-sided</a:t>
+            </a:r>
+            <a:r>
+              <a:rPr sz="2000"/>
+              <a:t> CI (</a:t>
+            </a:r>
+            <a:r>
+              <a:rPr sz="2000">
+                <a:latin typeface="Courier"/>
+              </a:rPr>
+              <a:t>-Inf</a:t>
+            </a:r>
+            <a:r>
+              <a:rPr sz="2000"/>
+              <a:t> or </a:t>
+            </a:r>
+            <a:r>
+              <a:rPr sz="2000">
+                <a:latin typeface="Courier"/>
+              </a:rPr>
+              <a:t>Inf</a:t>
+            </a:r>
+            <a:r>
+              <a:rPr sz="2000"/>
+              <a:t> at one end).</a:t>
             </a:r>
           </a:p>
         </p:txBody>
@@ -5416,7 +4663,7 @@
             </a:pPr>
             <a:r>
               <a:rPr i="1"/>
-              <a:t>End of Worksheet 10. Next: Worksheet 11 — regression.</a:t>
+              <a:t>End of the T-Tests II worksheet. Next: regression.</a:t>
             </a:r>
           </a:p>
         </p:txBody>
@@ -5496,7 +4743,7 @@
             </a:pPr>
             <a:r>
               <a:rPr b="1"/>
-              <a:t>Recap from Worksheet 09</a:t>
+              <a:t>Recap from the T-Tests I worksheet</a:t>
             </a:r>
           </a:p>
           <a:p>
@@ -5662,11 +4909,11 @@
             </a:r>
             <a:r>
               <a:rPr sz="2000" b="1"/>
-              <a:t>Going further</a:t>
+              <a:t>Extension</a:t>
             </a:r>
             <a:r>
               <a:rPr sz="2000"/>
-              <a:t> section is optional if you finish early.</a:t>
+              <a:t> at the end is done out of class (~30–40 min) and turned in with the worksheet.</a:t>
             </a:r>
           </a:p>
         </p:txBody>
@@ -6496,7 +5743,7 @@
             </a:r>
             <a:r>
               <a:rPr/>
-              <a:t> From Worksheet 09, what was your decision about normality and variance? Were you clear to proceed with Welch’s?</a:t>
+              <a:t> From the T-Tests I worksheet, what was your decision about normality and variance? Were you clear to proceed with Welch’s?</a:t>
             </a:r>
           </a:p>
           <a:p>
